--- a/prompt_engineering/pe-2-1_techniques_0Shot_1Shot_FewShot_ChainOfThought_Role_v2.pptx
+++ b/prompt_engineering/pe-2-1_techniques_0Shot_1Shot_FewShot_ChainOfThought_Role_v2.pptx
@@ -5,7 +5,7 @@
     <p:sldMasterId id="2147483648" r:id="rId1"/>
   </p:sldMasterIdLst>
   <p:handoutMasterIdLst>
-    <p:handoutMasterId r:id="rId30"/>
+    <p:handoutMasterId r:id="rId28"/>
   </p:handoutMasterIdLst>
   <p:sldIdLst>
     <p:sldId id="257" r:id="rId2"/>
@@ -20,22 +20,20 @@
     <p:sldId id="278" r:id="rId11"/>
     <p:sldId id="262" r:id="rId12"/>
     <p:sldId id="263" r:id="rId13"/>
-    <p:sldId id="264" r:id="rId14"/>
-    <p:sldId id="265" r:id="rId15"/>
-    <p:sldId id="275" r:id="rId16"/>
-    <p:sldId id="276" r:id="rId17"/>
-    <p:sldId id="266" r:id="rId18"/>
-    <p:sldId id="267" r:id="rId19"/>
-    <p:sldId id="268" r:id="rId20"/>
-    <p:sldId id="279" r:id="rId21"/>
-    <p:sldId id="280" r:id="rId22"/>
-    <p:sldId id="281" r:id="rId23"/>
-    <p:sldId id="270" r:id="rId24"/>
-    <p:sldId id="271" r:id="rId25"/>
-    <p:sldId id="273" r:id="rId26"/>
-    <p:sldId id="274" r:id="rId27"/>
-    <p:sldId id="272" r:id="rId28"/>
-    <p:sldId id="269" r:id="rId29"/>
+    <p:sldId id="275" r:id="rId14"/>
+    <p:sldId id="276" r:id="rId15"/>
+    <p:sldId id="266" r:id="rId16"/>
+    <p:sldId id="267" r:id="rId17"/>
+    <p:sldId id="268" r:id="rId18"/>
+    <p:sldId id="279" r:id="rId19"/>
+    <p:sldId id="280" r:id="rId20"/>
+    <p:sldId id="281" r:id="rId21"/>
+    <p:sldId id="270" r:id="rId22"/>
+    <p:sldId id="271" r:id="rId23"/>
+    <p:sldId id="273" r:id="rId24"/>
+    <p:sldId id="274" r:id="rId25"/>
+    <p:sldId id="272" r:id="rId26"/>
+    <p:sldId id="269" r:id="rId27"/>
   </p:sldIdLst>
   <p:sldSz cx="12192000" cy="6858000"/>
   <p:notesSz cx="6858000" cy="9144000"/>
@@ -239,7 +237,7 @@
           <a:p>
             <a:fld id="{7BAEECA8-D063-486F-AE31-5020270C1449}" type="datetimeFigureOut">
               <a:rPr lang="en-US" smtClean="0"/>
-              <a:t>6/16/2026</a:t>
+              <a:t>7/9/2026</a:t>
             </a:fld>
             <a:endParaRPr lang="en-US"/>
           </a:p>
@@ -481,7 +479,7 @@
           <a:p>
             <a:fld id="{6383FAE1-13DE-4511-8C1B-C8AFB720664C}" type="datetimeFigureOut">
               <a:rPr lang="en-US" smtClean="0"/>
-              <a:t>6/16/2026</a:t>
+              <a:t>7/9/2026</a:t>
             </a:fld>
             <a:endParaRPr lang="en-US"/>
           </a:p>
@@ -679,7 +677,7 @@
           <a:p>
             <a:fld id="{6383FAE1-13DE-4511-8C1B-C8AFB720664C}" type="datetimeFigureOut">
               <a:rPr lang="en-US" smtClean="0"/>
-              <a:t>6/16/2026</a:t>
+              <a:t>7/9/2026</a:t>
             </a:fld>
             <a:endParaRPr lang="en-US"/>
           </a:p>
@@ -887,7 +885,7 @@
           <a:p>
             <a:fld id="{6383FAE1-13DE-4511-8C1B-C8AFB720664C}" type="datetimeFigureOut">
               <a:rPr lang="en-US" smtClean="0"/>
-              <a:t>6/16/2026</a:t>
+              <a:t>7/9/2026</a:t>
             </a:fld>
             <a:endParaRPr lang="en-US"/>
           </a:p>
@@ -1085,7 +1083,7 @@
           <a:p>
             <a:fld id="{6383FAE1-13DE-4511-8C1B-C8AFB720664C}" type="datetimeFigureOut">
               <a:rPr lang="en-US" smtClean="0"/>
-              <a:t>6/16/2026</a:t>
+              <a:t>7/9/2026</a:t>
             </a:fld>
             <a:endParaRPr lang="en-US"/>
           </a:p>
@@ -1360,7 +1358,7 @@
           <a:p>
             <a:fld id="{6383FAE1-13DE-4511-8C1B-C8AFB720664C}" type="datetimeFigureOut">
               <a:rPr lang="en-US" smtClean="0"/>
-              <a:t>6/16/2026</a:t>
+              <a:t>7/9/2026</a:t>
             </a:fld>
             <a:endParaRPr lang="en-US"/>
           </a:p>
@@ -1625,7 +1623,7 @@
           <a:p>
             <a:fld id="{6383FAE1-13DE-4511-8C1B-C8AFB720664C}" type="datetimeFigureOut">
               <a:rPr lang="en-US" smtClean="0"/>
-              <a:t>6/16/2026</a:t>
+              <a:t>7/9/2026</a:t>
             </a:fld>
             <a:endParaRPr lang="en-US"/>
           </a:p>
@@ -2037,7 +2035,7 @@
           <a:p>
             <a:fld id="{6383FAE1-13DE-4511-8C1B-C8AFB720664C}" type="datetimeFigureOut">
               <a:rPr lang="en-US" smtClean="0"/>
-              <a:t>6/16/2026</a:t>
+              <a:t>7/9/2026</a:t>
             </a:fld>
             <a:endParaRPr lang="en-US"/>
           </a:p>
@@ -2178,7 +2176,7 @@
           <a:p>
             <a:fld id="{6383FAE1-13DE-4511-8C1B-C8AFB720664C}" type="datetimeFigureOut">
               <a:rPr lang="en-US" smtClean="0"/>
-              <a:t>6/16/2026</a:t>
+              <a:t>7/9/2026</a:t>
             </a:fld>
             <a:endParaRPr lang="en-US"/>
           </a:p>
@@ -2291,7 +2289,7 @@
           <a:p>
             <a:fld id="{6383FAE1-13DE-4511-8C1B-C8AFB720664C}" type="datetimeFigureOut">
               <a:rPr lang="en-US" smtClean="0"/>
-              <a:t>6/16/2026</a:t>
+              <a:t>7/9/2026</a:t>
             </a:fld>
             <a:endParaRPr lang="en-US"/>
           </a:p>
@@ -2602,7 +2600,7 @@
           <a:p>
             <a:fld id="{6383FAE1-13DE-4511-8C1B-C8AFB720664C}" type="datetimeFigureOut">
               <a:rPr lang="en-US" smtClean="0"/>
-              <a:t>6/16/2026</a:t>
+              <a:t>7/9/2026</a:t>
             </a:fld>
             <a:endParaRPr lang="en-US"/>
           </a:p>
@@ -2893,7 +2891,7 @@
           <a:p>
             <a:fld id="{6383FAE1-13DE-4511-8C1B-C8AFB720664C}" type="datetimeFigureOut">
               <a:rPr lang="en-US" smtClean="0"/>
-              <a:t>6/16/2026</a:t>
+              <a:t>7/9/2026</a:t>
             </a:fld>
             <a:endParaRPr lang="en-US"/>
           </a:p>
@@ -3137,7 +3135,7 @@
           <a:p>
             <a:fld id="{6383FAE1-13DE-4511-8C1B-C8AFB720664C}" type="datetimeFigureOut">
               <a:rPr lang="en-US" smtClean="0"/>
-              <a:t>6/16/2026</a:t>
+              <a:t>7/9/2026</a:t>
             </a:fld>
             <a:endParaRPr lang="en-US"/>
           </a:p>
@@ -4341,399 +4339,6 @@
         <p:cNvPr id="1" name="">
           <a:extLst>
             <a:ext uri="{FF2B5EF4-FFF2-40B4-BE49-F238E27FC236}">
-              <a16:creationId xmlns:a16="http://schemas.microsoft.com/office/drawing/2014/main" id="{9DAEE51F-2C4A-B8DB-AE64-5D165D9302F0}"/>
-            </a:ext>
-          </a:extLst>
-        </p:cNvPr>
-        <p:cNvGrpSpPr/>
-        <p:nvPr/>
-      </p:nvGrpSpPr>
-      <p:grpSpPr>
-        <a:xfrm>
-          <a:off x="0" y="0"/>
-          <a:ext cx="0" cy="0"/>
-          <a:chOff x="0" y="0"/>
-          <a:chExt cx="0" cy="0"/>
-        </a:xfrm>
-      </p:grpSpPr>
-      <p:sp>
-        <p:nvSpPr>
-          <p:cNvPr id="4" name="TextBox 3">
-            <a:extLst>
-              <a:ext uri="{FF2B5EF4-FFF2-40B4-BE49-F238E27FC236}">
-                <a16:creationId xmlns:a16="http://schemas.microsoft.com/office/drawing/2014/main" id="{68BB666D-C6E0-6E80-4912-C568D3ABC308}"/>
-              </a:ext>
-            </a:extLst>
-          </p:cNvPr>
-          <p:cNvSpPr txBox="1"/>
-          <p:nvPr/>
-        </p:nvSpPr>
-        <p:spPr>
-          <a:xfrm>
-            <a:off x="182880" y="312874"/>
-            <a:ext cx="11713464" cy="3046988"/>
-          </a:xfrm>
-          <a:prstGeom prst="rect">
-            <a:avLst/>
-          </a:prstGeom>
-          <a:noFill/>
-        </p:spPr>
-        <p:txBody>
-          <a:bodyPr wrap="square">
-            <a:spAutoFit/>
-          </a:bodyPr>
-          <a:lstStyle/>
-          <a:p>
-            <a:r>
-              <a:rPr lang="en-US" sz="2400" b="1" dirty="0">
-                <a:solidFill>
-                  <a:schemeClr val="accent6">
-                    <a:lumMod val="60000"/>
-                    <a:lumOff val="40000"/>
-                  </a:schemeClr>
-                </a:solidFill>
-              </a:rPr>
-              <a:t>Example Without Chain-of-Thought</a:t>
-            </a:r>
-          </a:p>
-          <a:p>
-            <a:endParaRPr lang="en-US" sz="2400" dirty="0">
-              <a:solidFill>
-                <a:schemeClr val="accent6">
-                  <a:lumMod val="60000"/>
-                  <a:lumOff val="40000"/>
-                </a:schemeClr>
-              </a:solidFill>
-            </a:endParaRPr>
-          </a:p>
-          <a:p>
-            <a:r>
-              <a:rPr lang="en-US" sz="2400" dirty="0">
-                <a:solidFill>
-                  <a:schemeClr val="accent6">
-                    <a:lumMod val="60000"/>
-                    <a:lumOff val="40000"/>
-                  </a:schemeClr>
-                </a:solidFill>
-              </a:rPr>
-              <a:t>Prompt:</a:t>
-            </a:r>
-          </a:p>
-          <a:p>
-            <a:r>
-              <a:rPr lang="en-US" sz="2400" b="1" dirty="0">
-                <a:solidFill>
-                  <a:schemeClr val="accent4">
-                    <a:lumMod val="60000"/>
-                    <a:lumOff val="40000"/>
-                  </a:schemeClr>
-                </a:solidFill>
-              </a:rPr>
-              <a:t>If a train travels 60 km in 1 hour, how far will it travel in 3 hours?</a:t>
-            </a:r>
-          </a:p>
-          <a:p>
-            <a:endParaRPr lang="en-US" sz="2400" dirty="0">
-              <a:solidFill>
-                <a:schemeClr val="accent6">
-                  <a:lumMod val="60000"/>
-                  <a:lumOff val="40000"/>
-                </a:schemeClr>
-              </a:solidFill>
-            </a:endParaRPr>
-          </a:p>
-          <a:p>
-            <a:endParaRPr lang="en-US" sz="2400" dirty="0">
-              <a:solidFill>
-                <a:schemeClr val="accent6">
-                  <a:lumMod val="60000"/>
-                  <a:lumOff val="40000"/>
-                </a:schemeClr>
-              </a:solidFill>
-            </a:endParaRPr>
-          </a:p>
-          <a:p>
-            <a:r>
-              <a:rPr lang="en-US" sz="2400" dirty="0">
-                <a:solidFill>
-                  <a:schemeClr val="accent6">
-                    <a:lumMod val="60000"/>
-                    <a:lumOff val="40000"/>
-                  </a:schemeClr>
-                </a:solidFill>
-              </a:rPr>
-              <a:t>AI may directly give the answer:</a:t>
-            </a:r>
-          </a:p>
-          <a:p>
-            <a:r>
-              <a:rPr lang="en-US" sz="2400" b="1" dirty="0">
-                <a:solidFill>
-                  <a:schemeClr val="accent6">
-                    <a:lumMod val="60000"/>
-                    <a:lumOff val="40000"/>
-                  </a:schemeClr>
-                </a:solidFill>
-              </a:rPr>
-              <a:t>180 km</a:t>
-            </a:r>
-          </a:p>
-        </p:txBody>
-      </p:sp>
-    </p:spTree>
-    <p:extLst>
-      <p:ext uri="{BB962C8B-B14F-4D97-AF65-F5344CB8AC3E}">
-        <p14:creationId xmlns:p14="http://schemas.microsoft.com/office/powerpoint/2010/main" val="159599695"/>
-      </p:ext>
-    </p:extLst>
-  </p:cSld>
-  <p:clrMapOvr>
-    <a:masterClrMapping/>
-  </p:clrMapOvr>
-</p:sld>
-</file>
-
-<file path=ppt/slides/slide14.xml><?xml version="1.0" encoding="utf-8"?>
-<p:sld xmlns:a="http://schemas.openxmlformats.org/drawingml/2006/main" xmlns:r="http://schemas.openxmlformats.org/officeDocument/2006/relationships" xmlns:p="http://schemas.openxmlformats.org/presentationml/2006/main">
-  <p:cSld>
-    <p:spTree>
-      <p:nvGrpSpPr>
-        <p:cNvPr id="1" name="">
-          <a:extLst>
-            <a:ext uri="{FF2B5EF4-FFF2-40B4-BE49-F238E27FC236}">
-              <a16:creationId xmlns:a16="http://schemas.microsoft.com/office/drawing/2014/main" id="{E482E8BC-FE13-8DBD-F6CA-A2F88B43DC9C}"/>
-            </a:ext>
-          </a:extLst>
-        </p:cNvPr>
-        <p:cNvGrpSpPr/>
-        <p:nvPr/>
-      </p:nvGrpSpPr>
-      <p:grpSpPr>
-        <a:xfrm>
-          <a:off x="0" y="0"/>
-          <a:ext cx="0" cy="0"/>
-          <a:chOff x="0" y="0"/>
-          <a:chExt cx="0" cy="0"/>
-        </a:xfrm>
-      </p:grpSpPr>
-      <p:sp>
-        <p:nvSpPr>
-          <p:cNvPr id="4" name="TextBox 3">
-            <a:extLst>
-              <a:ext uri="{FF2B5EF4-FFF2-40B4-BE49-F238E27FC236}">
-                <a16:creationId xmlns:a16="http://schemas.microsoft.com/office/drawing/2014/main" id="{EBC16BFF-EDC8-05EB-8AE6-D8690745D06E}"/>
-              </a:ext>
-            </a:extLst>
-          </p:cNvPr>
-          <p:cNvSpPr txBox="1"/>
-          <p:nvPr/>
-        </p:nvSpPr>
-        <p:spPr>
-          <a:xfrm>
-            <a:off x="182880" y="312874"/>
-            <a:ext cx="11713464" cy="4893647"/>
-          </a:xfrm>
-          <a:prstGeom prst="rect">
-            <a:avLst/>
-          </a:prstGeom>
-          <a:noFill/>
-        </p:spPr>
-        <p:txBody>
-          <a:bodyPr wrap="square">
-            <a:spAutoFit/>
-          </a:bodyPr>
-          <a:lstStyle/>
-          <a:p>
-            <a:r>
-              <a:rPr lang="en-US" sz="2400" b="1" dirty="0">
-                <a:solidFill>
-                  <a:schemeClr val="accent6">
-                    <a:lumMod val="60000"/>
-                    <a:lumOff val="40000"/>
-                  </a:schemeClr>
-                </a:solidFill>
-              </a:rPr>
-              <a:t>Example With Chain-of-Thought</a:t>
-            </a:r>
-          </a:p>
-          <a:p>
-            <a:endParaRPr lang="en-US" sz="2400" dirty="0">
-              <a:solidFill>
-                <a:schemeClr val="accent6">
-                  <a:lumMod val="60000"/>
-                  <a:lumOff val="40000"/>
-                </a:schemeClr>
-              </a:solidFill>
-            </a:endParaRPr>
-          </a:p>
-          <a:p>
-            <a:r>
-              <a:rPr lang="en-US" sz="2400" dirty="0">
-                <a:solidFill>
-                  <a:schemeClr val="accent6">
-                    <a:lumMod val="60000"/>
-                    <a:lumOff val="40000"/>
-                  </a:schemeClr>
-                </a:solidFill>
-              </a:rPr>
-              <a:t>Prompt:</a:t>
-            </a:r>
-          </a:p>
-          <a:p>
-            <a:r>
-              <a:rPr lang="en-US" sz="2400" dirty="0">
-                <a:solidFill>
-                  <a:schemeClr val="accent4">
-                    <a:lumMod val="60000"/>
-                    <a:lumOff val="40000"/>
-                  </a:schemeClr>
-                </a:solidFill>
-              </a:rPr>
-              <a:t>Solve the problem </a:t>
-            </a:r>
-            <a:r>
-              <a:rPr lang="en-US" sz="2400" b="1" dirty="0">
-                <a:solidFill>
-                  <a:schemeClr val="accent4">
-                    <a:lumMod val="60000"/>
-                    <a:lumOff val="40000"/>
-                  </a:schemeClr>
-                </a:solidFill>
-              </a:rPr>
-              <a:t>step-by-step.</a:t>
-            </a:r>
-          </a:p>
-          <a:p>
-            <a:r>
-              <a:rPr lang="en-US" sz="2400" dirty="0">
-                <a:solidFill>
-                  <a:schemeClr val="accent4">
-                    <a:lumMod val="60000"/>
-                    <a:lumOff val="40000"/>
-                  </a:schemeClr>
-                </a:solidFill>
-              </a:rPr>
-              <a:t> If a train travels 60 km in 1 hour, how far will it travel in 3 hours?</a:t>
-            </a:r>
-          </a:p>
-          <a:p>
-            <a:endParaRPr lang="en-US" sz="2400" dirty="0">
-              <a:solidFill>
-                <a:schemeClr val="accent6">
-                  <a:lumMod val="60000"/>
-                  <a:lumOff val="40000"/>
-                </a:schemeClr>
-              </a:solidFill>
-            </a:endParaRPr>
-          </a:p>
-          <a:p>
-            <a:endParaRPr lang="en-US" sz="2400" dirty="0">
-              <a:solidFill>
-                <a:schemeClr val="accent6">
-                  <a:lumMod val="60000"/>
-                  <a:lumOff val="40000"/>
-                </a:schemeClr>
-              </a:solidFill>
-            </a:endParaRPr>
-          </a:p>
-          <a:p>
-            <a:r>
-              <a:rPr lang="en-US" sz="2400" dirty="0">
-                <a:solidFill>
-                  <a:schemeClr val="accent6">
-                    <a:lumMod val="60000"/>
-                    <a:lumOff val="40000"/>
-                  </a:schemeClr>
-                </a:solidFill>
-              </a:rPr>
-              <a:t>AI Output:</a:t>
-            </a:r>
-          </a:p>
-          <a:p>
-            <a:r>
-              <a:rPr lang="en-US" sz="2400" dirty="0">
-                <a:solidFill>
-                  <a:schemeClr val="accent6">
-                    <a:lumMod val="60000"/>
-                    <a:lumOff val="40000"/>
-                  </a:schemeClr>
-                </a:solidFill>
-              </a:rPr>
-              <a:t>Step 1: Distance covered in 1 hour = 60 km</a:t>
-            </a:r>
-          </a:p>
-          <a:p>
-            <a:r>
-              <a:rPr lang="en-US" sz="2400" dirty="0">
-                <a:solidFill>
-                  <a:schemeClr val="accent6">
-                    <a:lumMod val="60000"/>
-                    <a:lumOff val="40000"/>
-                  </a:schemeClr>
-                </a:solidFill>
-              </a:rPr>
-              <a:t>Step 2: Total time = 3 hours</a:t>
-            </a:r>
-          </a:p>
-          <a:p>
-            <a:r>
-              <a:rPr lang="en-US" sz="2400" dirty="0">
-                <a:solidFill>
-                  <a:schemeClr val="accent6">
-                    <a:lumMod val="60000"/>
-                    <a:lumOff val="40000"/>
-                  </a:schemeClr>
-                </a:solidFill>
-              </a:rPr>
-              <a:t>Step 3: Total distance = 60 × 3</a:t>
-            </a:r>
-          </a:p>
-          <a:p>
-            <a:endParaRPr lang="en-US" sz="2400" dirty="0">
-              <a:solidFill>
-                <a:schemeClr val="accent6">
-                  <a:lumMod val="60000"/>
-                  <a:lumOff val="40000"/>
-                </a:schemeClr>
-              </a:solidFill>
-            </a:endParaRPr>
-          </a:p>
-          <a:p>
-            <a:r>
-              <a:rPr lang="en-US" sz="2400" dirty="0">
-                <a:solidFill>
-                  <a:schemeClr val="accent6">
-                    <a:lumMod val="60000"/>
-                    <a:lumOff val="40000"/>
-                  </a:schemeClr>
-                </a:solidFill>
-              </a:rPr>
-              <a:t>Final Answer: 180 km</a:t>
-            </a:r>
-          </a:p>
-        </p:txBody>
-      </p:sp>
-    </p:spTree>
-    <p:extLst>
-      <p:ext uri="{BB962C8B-B14F-4D97-AF65-F5344CB8AC3E}">
-        <p14:creationId xmlns:p14="http://schemas.microsoft.com/office/powerpoint/2010/main" val="1924282136"/>
-      </p:ext>
-    </p:extLst>
-  </p:cSld>
-  <p:clrMapOvr>
-    <a:masterClrMapping/>
-  </p:clrMapOvr>
-</p:sld>
-</file>
-
-<file path=ppt/slides/slide15.xml><?xml version="1.0" encoding="utf-8"?>
-<p:sld xmlns:a="http://schemas.openxmlformats.org/drawingml/2006/main" xmlns:r="http://schemas.openxmlformats.org/officeDocument/2006/relationships" xmlns:p="http://schemas.openxmlformats.org/presentationml/2006/main">
-  <p:cSld>
-    <p:spTree>
-      <p:nvGrpSpPr>
-        <p:cNvPr id="1" name="">
-          <a:extLst>
-            <a:ext uri="{FF2B5EF4-FFF2-40B4-BE49-F238E27FC236}">
               <a16:creationId xmlns:a16="http://schemas.microsoft.com/office/drawing/2014/main" id="{6C4AD66E-4735-F0B2-FD16-5C2E583EFBA7}"/>
             </a:ext>
           </a:extLst>
@@ -4870,36 +4475,6 @@
           </a:p>
         </p:txBody>
       </p:sp>
-      <p:pic>
-        <p:nvPicPr>
-          <p:cNvPr id="3" name="Picture 2">
-            <a:extLst>
-              <a:ext uri="{FF2B5EF4-FFF2-40B4-BE49-F238E27FC236}">
-                <a16:creationId xmlns:a16="http://schemas.microsoft.com/office/drawing/2014/main" id="{D59C88AE-DBB7-9BF1-4BAE-FF6C49FCA609}"/>
-              </a:ext>
-            </a:extLst>
-          </p:cNvPr>
-          <p:cNvPicPr>
-            <a:picLocks noChangeAspect="1"/>
-          </p:cNvPicPr>
-          <p:nvPr/>
-        </p:nvPicPr>
-        <p:blipFill>
-          <a:blip r:embed="rId2"/>
-          <a:stretch>
-            <a:fillRect/>
-          </a:stretch>
-        </p:blipFill>
-        <p:spPr>
-          <a:xfrm>
-            <a:off x="5351263" y="3959352"/>
-            <a:ext cx="3633317" cy="2224031"/>
-          </a:xfrm>
-          <a:prstGeom prst="rect">
-            <a:avLst/>
-          </a:prstGeom>
-        </p:spPr>
-      </p:pic>
     </p:spTree>
     <p:extLst>
       <p:ext uri="{BB962C8B-B14F-4D97-AF65-F5344CB8AC3E}">
@@ -4913,7 +4488,7 @@
 </p:sld>
 </file>
 
-<file path=ppt/slides/slide16.xml><?xml version="1.0" encoding="utf-8"?>
+<file path=ppt/slides/slide14.xml><?xml version="1.0" encoding="utf-8"?>
 <p:sld xmlns:a="http://schemas.openxmlformats.org/drawingml/2006/main" xmlns:r="http://schemas.openxmlformats.org/officeDocument/2006/relationships" xmlns:p="http://schemas.openxmlformats.org/presentationml/2006/main">
   <p:cSld>
     <p:spTree>
@@ -5146,7 +4721,7 @@
 </p:sld>
 </file>
 
-<file path=ppt/slides/slide17.xml><?xml version="1.0" encoding="utf-8"?>
+<file path=ppt/slides/slide15.xml><?xml version="1.0" encoding="utf-8"?>
 <p:sld xmlns:a="http://schemas.openxmlformats.org/drawingml/2006/main" xmlns:r="http://schemas.openxmlformats.org/officeDocument/2006/relationships" xmlns:p="http://schemas.openxmlformats.org/presentationml/2006/main">
   <p:cSld>
     <p:spTree>
@@ -5359,7 +4934,7 @@
 </p:sld>
 </file>
 
-<file path=ppt/slides/slide18.xml><?xml version="1.0" encoding="utf-8"?>
+<file path=ppt/slides/slide16.xml><?xml version="1.0" encoding="utf-8"?>
 <p:sld xmlns:a="http://schemas.openxmlformats.org/drawingml/2006/main" xmlns:r="http://schemas.openxmlformats.org/officeDocument/2006/relationships" xmlns:p="http://schemas.openxmlformats.org/presentationml/2006/main">
   <p:cSld>
     <p:spTree>
@@ -5630,7 +5205,7 @@
 </p:sld>
 </file>
 
-<file path=ppt/slides/slide19.xml><?xml version="1.0" encoding="utf-8"?>
+<file path=ppt/slides/slide17.xml><?xml version="1.0" encoding="utf-8"?>
 <p:sld xmlns:a="http://schemas.openxmlformats.org/drawingml/2006/main" xmlns:r="http://schemas.openxmlformats.org/officeDocument/2006/relationships" xmlns:p="http://schemas.openxmlformats.org/presentationml/2006/main">
   <p:cSld>
     <p:spTree>
@@ -5936,6 +5511,228 @@
     <p:extLst>
       <p:ext uri="{BB962C8B-B14F-4D97-AF65-F5344CB8AC3E}">
         <p14:creationId xmlns:p14="http://schemas.microsoft.com/office/powerpoint/2010/main" val="2878737807"/>
+      </p:ext>
+    </p:extLst>
+  </p:cSld>
+  <p:clrMapOvr>
+    <a:masterClrMapping/>
+  </p:clrMapOvr>
+</p:sld>
+</file>
+
+<file path=ppt/slides/slide18.xml><?xml version="1.0" encoding="utf-8"?>
+<p:sld xmlns:a="http://schemas.openxmlformats.org/drawingml/2006/main" xmlns:r="http://schemas.openxmlformats.org/officeDocument/2006/relationships" xmlns:p="http://schemas.openxmlformats.org/presentationml/2006/main">
+  <p:cSld>
+    <p:spTree>
+      <p:nvGrpSpPr>
+        <p:cNvPr id="1" name="">
+          <a:extLst>
+            <a:ext uri="{FF2B5EF4-FFF2-40B4-BE49-F238E27FC236}">
+              <a16:creationId xmlns:a16="http://schemas.microsoft.com/office/drawing/2014/main" id="{52954328-619F-95AF-71BB-D1967A1350A2}"/>
+            </a:ext>
+          </a:extLst>
+        </p:cNvPr>
+        <p:cNvGrpSpPr/>
+        <p:nvPr/>
+      </p:nvGrpSpPr>
+      <p:grpSpPr>
+        <a:xfrm>
+          <a:off x="0" y="0"/>
+          <a:ext cx="0" cy="0"/>
+          <a:chOff x="0" y="0"/>
+          <a:chExt cx="0" cy="0"/>
+        </a:xfrm>
+      </p:grpSpPr>
+      <p:pic>
+        <p:nvPicPr>
+          <p:cNvPr id="4" name="Picture 3">
+            <a:extLst>
+              <a:ext uri="{FF2B5EF4-FFF2-40B4-BE49-F238E27FC236}">
+                <a16:creationId xmlns:a16="http://schemas.microsoft.com/office/drawing/2014/main" id="{F6779894-EEED-9FFB-166E-A57AF7AA8175}"/>
+              </a:ext>
+            </a:extLst>
+          </p:cNvPr>
+          <p:cNvPicPr>
+            <a:picLocks noChangeAspect="1"/>
+          </p:cNvPicPr>
+          <p:nvPr/>
+        </p:nvPicPr>
+        <p:blipFill>
+          <a:blip r:embed="rId2"/>
+          <a:stretch>
+            <a:fillRect/>
+          </a:stretch>
+        </p:blipFill>
+        <p:spPr>
+          <a:xfrm>
+            <a:off x="6455664" y="967685"/>
+            <a:ext cx="4178134" cy="4537115"/>
+          </a:xfrm>
+          <a:prstGeom prst="rect">
+            <a:avLst/>
+          </a:prstGeom>
+        </p:spPr>
+      </p:pic>
+      <p:pic>
+        <p:nvPicPr>
+          <p:cNvPr id="7" name="Picture 6">
+            <a:extLst>
+              <a:ext uri="{FF2B5EF4-FFF2-40B4-BE49-F238E27FC236}">
+                <a16:creationId xmlns:a16="http://schemas.microsoft.com/office/drawing/2014/main" id="{A1D7854E-06A7-1CC4-376A-D2901C1C9250}"/>
+              </a:ext>
+            </a:extLst>
+          </p:cNvPr>
+          <p:cNvPicPr>
+            <a:picLocks noChangeAspect="1"/>
+          </p:cNvPicPr>
+          <p:nvPr/>
+        </p:nvPicPr>
+        <p:blipFill>
+          <a:blip r:embed="rId3"/>
+          <a:stretch>
+            <a:fillRect/>
+          </a:stretch>
+        </p:blipFill>
+        <p:spPr>
+          <a:xfrm>
+            <a:off x="234409" y="1278184"/>
+            <a:ext cx="4115374" cy="1009791"/>
+          </a:xfrm>
+          <a:prstGeom prst="rect">
+            <a:avLst/>
+          </a:prstGeom>
+        </p:spPr>
+      </p:pic>
+    </p:spTree>
+    <p:extLst>
+      <p:ext uri="{BB962C8B-B14F-4D97-AF65-F5344CB8AC3E}">
+        <p14:creationId xmlns:p14="http://schemas.microsoft.com/office/powerpoint/2010/main" val="2816302705"/>
+      </p:ext>
+    </p:extLst>
+  </p:cSld>
+  <p:clrMapOvr>
+    <a:masterClrMapping/>
+  </p:clrMapOvr>
+</p:sld>
+</file>
+
+<file path=ppt/slides/slide19.xml><?xml version="1.0" encoding="utf-8"?>
+<p:sld xmlns:a="http://schemas.openxmlformats.org/drawingml/2006/main" xmlns:r="http://schemas.openxmlformats.org/officeDocument/2006/relationships" xmlns:p="http://schemas.openxmlformats.org/presentationml/2006/main">
+  <p:cSld>
+    <p:spTree>
+      <p:nvGrpSpPr>
+        <p:cNvPr id="1" name="">
+          <a:extLst>
+            <a:ext uri="{FF2B5EF4-FFF2-40B4-BE49-F238E27FC236}">
+              <a16:creationId xmlns:a16="http://schemas.microsoft.com/office/drawing/2014/main" id="{91C22B99-F0D2-69F8-5A22-9A1B892F43CC}"/>
+            </a:ext>
+          </a:extLst>
+        </p:cNvPr>
+        <p:cNvGrpSpPr/>
+        <p:nvPr/>
+      </p:nvGrpSpPr>
+      <p:grpSpPr>
+        <a:xfrm>
+          <a:off x="0" y="0"/>
+          <a:ext cx="0" cy="0"/>
+          <a:chOff x="0" y="0"/>
+          <a:chExt cx="0" cy="0"/>
+        </a:xfrm>
+      </p:grpSpPr>
+      <p:pic>
+        <p:nvPicPr>
+          <p:cNvPr id="4" name="Picture 3">
+            <a:extLst>
+              <a:ext uri="{FF2B5EF4-FFF2-40B4-BE49-F238E27FC236}">
+                <a16:creationId xmlns:a16="http://schemas.microsoft.com/office/drawing/2014/main" id="{8D07FD04-CD44-B989-E5A1-542AE33C89F1}"/>
+              </a:ext>
+            </a:extLst>
+          </p:cNvPr>
+          <p:cNvPicPr>
+            <a:picLocks noChangeAspect="1"/>
+          </p:cNvPicPr>
+          <p:nvPr/>
+        </p:nvPicPr>
+        <p:blipFill>
+          <a:blip r:embed="rId2"/>
+          <a:stretch>
+            <a:fillRect/>
+          </a:stretch>
+        </p:blipFill>
+        <p:spPr>
+          <a:xfrm>
+            <a:off x="124681" y="213784"/>
+            <a:ext cx="4115374" cy="1905266"/>
+          </a:xfrm>
+          <a:prstGeom prst="rect">
+            <a:avLst/>
+          </a:prstGeom>
+        </p:spPr>
+      </p:pic>
+      <p:pic>
+        <p:nvPicPr>
+          <p:cNvPr id="7" name="Picture 6">
+            <a:extLst>
+              <a:ext uri="{FF2B5EF4-FFF2-40B4-BE49-F238E27FC236}">
+                <a16:creationId xmlns:a16="http://schemas.microsoft.com/office/drawing/2014/main" id="{9C7BD846-B36C-D830-67F6-6579E8034A6E}"/>
+              </a:ext>
+            </a:extLst>
+          </p:cNvPr>
+          <p:cNvPicPr>
+            <a:picLocks noChangeAspect="1"/>
+          </p:cNvPicPr>
+          <p:nvPr/>
+        </p:nvPicPr>
+        <p:blipFill>
+          <a:blip r:embed="rId3"/>
+          <a:stretch>
+            <a:fillRect/>
+          </a:stretch>
+        </p:blipFill>
+        <p:spPr>
+          <a:xfrm>
+            <a:off x="0" y="2018625"/>
+            <a:ext cx="4810796" cy="4839375"/>
+          </a:xfrm>
+          <a:prstGeom prst="rect">
+            <a:avLst/>
+          </a:prstGeom>
+        </p:spPr>
+      </p:pic>
+      <p:pic>
+        <p:nvPicPr>
+          <p:cNvPr id="9" name="Picture 8">
+            <a:extLst>
+              <a:ext uri="{FF2B5EF4-FFF2-40B4-BE49-F238E27FC236}">
+                <a16:creationId xmlns:a16="http://schemas.microsoft.com/office/drawing/2014/main" id="{C8534774-BC14-C9B9-B910-8F1028D41DEE}"/>
+              </a:ext>
+            </a:extLst>
+          </p:cNvPr>
+          <p:cNvPicPr>
+            <a:picLocks noChangeAspect="1"/>
+          </p:cNvPicPr>
+          <p:nvPr/>
+        </p:nvPicPr>
+        <p:blipFill>
+          <a:blip r:embed="rId4"/>
+          <a:stretch>
+            <a:fillRect/>
+          </a:stretch>
+        </p:blipFill>
+        <p:spPr>
+          <a:xfrm>
+            <a:off x="5000280" y="213784"/>
+            <a:ext cx="7259063" cy="4486901"/>
+          </a:xfrm>
+          <a:prstGeom prst="rect">
+            <a:avLst/>
+          </a:prstGeom>
+        </p:spPr>
+      </p:pic>
+    </p:spTree>
+    <p:extLst>
+      <p:ext uri="{BB962C8B-B14F-4D97-AF65-F5344CB8AC3E}">
+        <p14:creationId xmlns:p14="http://schemas.microsoft.com/office/powerpoint/2010/main" val="2994621357"/>
       </p:ext>
     </p:extLst>
   </p:cSld>
@@ -6096,228 +5893,6 @@
         <p:cNvPr id="1" name="">
           <a:extLst>
             <a:ext uri="{FF2B5EF4-FFF2-40B4-BE49-F238E27FC236}">
-              <a16:creationId xmlns:a16="http://schemas.microsoft.com/office/drawing/2014/main" id="{52954328-619F-95AF-71BB-D1967A1350A2}"/>
-            </a:ext>
-          </a:extLst>
-        </p:cNvPr>
-        <p:cNvGrpSpPr/>
-        <p:nvPr/>
-      </p:nvGrpSpPr>
-      <p:grpSpPr>
-        <a:xfrm>
-          <a:off x="0" y="0"/>
-          <a:ext cx="0" cy="0"/>
-          <a:chOff x="0" y="0"/>
-          <a:chExt cx="0" cy="0"/>
-        </a:xfrm>
-      </p:grpSpPr>
-      <p:pic>
-        <p:nvPicPr>
-          <p:cNvPr id="4" name="Picture 3">
-            <a:extLst>
-              <a:ext uri="{FF2B5EF4-FFF2-40B4-BE49-F238E27FC236}">
-                <a16:creationId xmlns:a16="http://schemas.microsoft.com/office/drawing/2014/main" id="{F6779894-EEED-9FFB-166E-A57AF7AA8175}"/>
-              </a:ext>
-            </a:extLst>
-          </p:cNvPr>
-          <p:cNvPicPr>
-            <a:picLocks noChangeAspect="1"/>
-          </p:cNvPicPr>
-          <p:nvPr/>
-        </p:nvPicPr>
-        <p:blipFill>
-          <a:blip r:embed="rId2"/>
-          <a:stretch>
-            <a:fillRect/>
-          </a:stretch>
-        </p:blipFill>
-        <p:spPr>
-          <a:xfrm>
-            <a:off x="6455664" y="967685"/>
-            <a:ext cx="4178134" cy="4537115"/>
-          </a:xfrm>
-          <a:prstGeom prst="rect">
-            <a:avLst/>
-          </a:prstGeom>
-        </p:spPr>
-      </p:pic>
-      <p:pic>
-        <p:nvPicPr>
-          <p:cNvPr id="7" name="Picture 6">
-            <a:extLst>
-              <a:ext uri="{FF2B5EF4-FFF2-40B4-BE49-F238E27FC236}">
-                <a16:creationId xmlns:a16="http://schemas.microsoft.com/office/drawing/2014/main" id="{A1D7854E-06A7-1CC4-376A-D2901C1C9250}"/>
-              </a:ext>
-            </a:extLst>
-          </p:cNvPr>
-          <p:cNvPicPr>
-            <a:picLocks noChangeAspect="1"/>
-          </p:cNvPicPr>
-          <p:nvPr/>
-        </p:nvPicPr>
-        <p:blipFill>
-          <a:blip r:embed="rId3"/>
-          <a:stretch>
-            <a:fillRect/>
-          </a:stretch>
-        </p:blipFill>
-        <p:spPr>
-          <a:xfrm>
-            <a:off x="234409" y="1278184"/>
-            <a:ext cx="4115374" cy="1009791"/>
-          </a:xfrm>
-          <a:prstGeom prst="rect">
-            <a:avLst/>
-          </a:prstGeom>
-        </p:spPr>
-      </p:pic>
-    </p:spTree>
-    <p:extLst>
-      <p:ext uri="{BB962C8B-B14F-4D97-AF65-F5344CB8AC3E}">
-        <p14:creationId xmlns:p14="http://schemas.microsoft.com/office/powerpoint/2010/main" val="2816302705"/>
-      </p:ext>
-    </p:extLst>
-  </p:cSld>
-  <p:clrMapOvr>
-    <a:masterClrMapping/>
-  </p:clrMapOvr>
-</p:sld>
-</file>
-
-<file path=ppt/slides/slide21.xml><?xml version="1.0" encoding="utf-8"?>
-<p:sld xmlns:a="http://schemas.openxmlformats.org/drawingml/2006/main" xmlns:r="http://schemas.openxmlformats.org/officeDocument/2006/relationships" xmlns:p="http://schemas.openxmlformats.org/presentationml/2006/main">
-  <p:cSld>
-    <p:spTree>
-      <p:nvGrpSpPr>
-        <p:cNvPr id="1" name="">
-          <a:extLst>
-            <a:ext uri="{FF2B5EF4-FFF2-40B4-BE49-F238E27FC236}">
-              <a16:creationId xmlns:a16="http://schemas.microsoft.com/office/drawing/2014/main" id="{91C22B99-F0D2-69F8-5A22-9A1B892F43CC}"/>
-            </a:ext>
-          </a:extLst>
-        </p:cNvPr>
-        <p:cNvGrpSpPr/>
-        <p:nvPr/>
-      </p:nvGrpSpPr>
-      <p:grpSpPr>
-        <a:xfrm>
-          <a:off x="0" y="0"/>
-          <a:ext cx="0" cy="0"/>
-          <a:chOff x="0" y="0"/>
-          <a:chExt cx="0" cy="0"/>
-        </a:xfrm>
-      </p:grpSpPr>
-      <p:pic>
-        <p:nvPicPr>
-          <p:cNvPr id="4" name="Picture 3">
-            <a:extLst>
-              <a:ext uri="{FF2B5EF4-FFF2-40B4-BE49-F238E27FC236}">
-                <a16:creationId xmlns:a16="http://schemas.microsoft.com/office/drawing/2014/main" id="{8D07FD04-CD44-B989-E5A1-542AE33C89F1}"/>
-              </a:ext>
-            </a:extLst>
-          </p:cNvPr>
-          <p:cNvPicPr>
-            <a:picLocks noChangeAspect="1"/>
-          </p:cNvPicPr>
-          <p:nvPr/>
-        </p:nvPicPr>
-        <p:blipFill>
-          <a:blip r:embed="rId2"/>
-          <a:stretch>
-            <a:fillRect/>
-          </a:stretch>
-        </p:blipFill>
-        <p:spPr>
-          <a:xfrm>
-            <a:off x="124681" y="213784"/>
-            <a:ext cx="4115374" cy="1905266"/>
-          </a:xfrm>
-          <a:prstGeom prst="rect">
-            <a:avLst/>
-          </a:prstGeom>
-        </p:spPr>
-      </p:pic>
-      <p:pic>
-        <p:nvPicPr>
-          <p:cNvPr id="7" name="Picture 6">
-            <a:extLst>
-              <a:ext uri="{FF2B5EF4-FFF2-40B4-BE49-F238E27FC236}">
-                <a16:creationId xmlns:a16="http://schemas.microsoft.com/office/drawing/2014/main" id="{9C7BD846-B36C-D830-67F6-6579E8034A6E}"/>
-              </a:ext>
-            </a:extLst>
-          </p:cNvPr>
-          <p:cNvPicPr>
-            <a:picLocks noChangeAspect="1"/>
-          </p:cNvPicPr>
-          <p:nvPr/>
-        </p:nvPicPr>
-        <p:blipFill>
-          <a:blip r:embed="rId3"/>
-          <a:stretch>
-            <a:fillRect/>
-          </a:stretch>
-        </p:blipFill>
-        <p:spPr>
-          <a:xfrm>
-            <a:off x="0" y="2018625"/>
-            <a:ext cx="4810796" cy="4839375"/>
-          </a:xfrm>
-          <a:prstGeom prst="rect">
-            <a:avLst/>
-          </a:prstGeom>
-        </p:spPr>
-      </p:pic>
-      <p:pic>
-        <p:nvPicPr>
-          <p:cNvPr id="9" name="Picture 8">
-            <a:extLst>
-              <a:ext uri="{FF2B5EF4-FFF2-40B4-BE49-F238E27FC236}">
-                <a16:creationId xmlns:a16="http://schemas.microsoft.com/office/drawing/2014/main" id="{C8534774-BC14-C9B9-B910-8F1028D41DEE}"/>
-              </a:ext>
-            </a:extLst>
-          </p:cNvPr>
-          <p:cNvPicPr>
-            <a:picLocks noChangeAspect="1"/>
-          </p:cNvPicPr>
-          <p:nvPr/>
-        </p:nvPicPr>
-        <p:blipFill>
-          <a:blip r:embed="rId4"/>
-          <a:stretch>
-            <a:fillRect/>
-          </a:stretch>
-        </p:blipFill>
-        <p:spPr>
-          <a:xfrm>
-            <a:off x="5000280" y="213784"/>
-            <a:ext cx="7259063" cy="4486901"/>
-          </a:xfrm>
-          <a:prstGeom prst="rect">
-            <a:avLst/>
-          </a:prstGeom>
-        </p:spPr>
-      </p:pic>
-    </p:spTree>
-    <p:extLst>
-      <p:ext uri="{BB962C8B-B14F-4D97-AF65-F5344CB8AC3E}">
-        <p14:creationId xmlns:p14="http://schemas.microsoft.com/office/powerpoint/2010/main" val="2994621357"/>
-      </p:ext>
-    </p:extLst>
-  </p:cSld>
-  <p:clrMapOvr>
-    <a:masterClrMapping/>
-  </p:clrMapOvr>
-</p:sld>
-</file>
-
-<file path=ppt/slides/slide22.xml><?xml version="1.0" encoding="utf-8"?>
-<p:sld xmlns:a="http://schemas.openxmlformats.org/drawingml/2006/main" xmlns:r="http://schemas.openxmlformats.org/officeDocument/2006/relationships" xmlns:p="http://schemas.openxmlformats.org/presentationml/2006/main">
-  <p:cSld>
-    <p:spTree>
-      <p:nvGrpSpPr>
-        <p:cNvPr id="1" name="">
-          <a:extLst>
-            <a:ext uri="{FF2B5EF4-FFF2-40B4-BE49-F238E27FC236}">
               <a16:creationId xmlns:a16="http://schemas.microsoft.com/office/drawing/2014/main" id="{36238A8F-DB85-F46E-ECB4-2299235E86E0}"/>
             </a:ext>
           </a:extLst>
@@ -6406,7 +5981,7 @@
 </p:sld>
 </file>
 
-<file path=ppt/slides/slide23.xml><?xml version="1.0" encoding="utf-8"?>
+<file path=ppt/slides/slide21.xml><?xml version="1.0" encoding="utf-8"?>
 <p:sld xmlns:a="http://schemas.openxmlformats.org/drawingml/2006/main" xmlns:r="http://schemas.openxmlformats.org/officeDocument/2006/relationships" xmlns:p="http://schemas.openxmlformats.org/presentationml/2006/main">
   <p:cSld>
     <p:spTree>
@@ -6668,7 +6243,7 @@
 </p:sld>
 </file>
 
-<file path=ppt/slides/slide24.xml><?xml version="1.0" encoding="utf-8"?>
+<file path=ppt/slides/slide22.xml><?xml version="1.0" encoding="utf-8"?>
 <p:sld xmlns:a="http://schemas.openxmlformats.org/drawingml/2006/main" xmlns:r="http://schemas.openxmlformats.org/officeDocument/2006/relationships" xmlns:p="http://schemas.openxmlformats.org/presentationml/2006/main">
   <p:cSld>
     <p:spTree>
@@ -6884,7 +6459,7 @@
 </p:sld>
 </file>
 
-<file path=ppt/slides/slide25.xml><?xml version="1.0" encoding="utf-8"?>
+<file path=ppt/slides/slide23.xml><?xml version="1.0" encoding="utf-8"?>
 <p:sld xmlns:a="http://schemas.openxmlformats.org/drawingml/2006/main" xmlns:r="http://schemas.openxmlformats.org/officeDocument/2006/relationships" xmlns:p="http://schemas.openxmlformats.org/presentationml/2006/main">
   <p:cSld>
     <p:spTree>
@@ -7058,7 +6633,7 @@
 </p:sld>
 </file>
 
-<file path=ppt/slides/slide26.xml><?xml version="1.0" encoding="utf-8"?>
+<file path=ppt/slides/slide24.xml><?xml version="1.0" encoding="utf-8"?>
 <p:sld xmlns:a="http://schemas.openxmlformats.org/drawingml/2006/main" xmlns:r="http://schemas.openxmlformats.org/officeDocument/2006/relationships" xmlns:p="http://schemas.openxmlformats.org/presentationml/2006/main">
   <p:cSld>
     <p:spTree>
@@ -7488,7 +7063,7 @@
 </p:sld>
 </file>
 
-<file path=ppt/slides/slide27.xml><?xml version="1.0" encoding="utf-8"?>
+<file path=ppt/slides/slide25.xml><?xml version="1.0" encoding="utf-8"?>
 <p:sld xmlns:a="http://schemas.openxmlformats.org/drawingml/2006/main" xmlns:r="http://schemas.openxmlformats.org/officeDocument/2006/relationships" xmlns:p="http://schemas.openxmlformats.org/presentationml/2006/main">
   <p:cSld>
     <p:spTree>
@@ -7790,7 +7365,7 @@
 </p:sld>
 </file>
 
-<file path=ppt/slides/slide28.xml><?xml version="1.0" encoding="utf-8"?>
+<file path=ppt/slides/slide26.xml><?xml version="1.0" encoding="utf-8"?>
 <p:sld xmlns:a="http://schemas.openxmlformats.org/drawingml/2006/main" xmlns:r="http://schemas.openxmlformats.org/officeDocument/2006/relationships" xmlns:p="http://schemas.openxmlformats.org/presentationml/2006/main">
   <p:cSld>
     <p:spTree>
